--- a/Instats/Day-4/Session-19/cosimmr-practical-instats.pptx
+++ b/Instats/Day-4/Session-19/cosimmr-practical-instats.pptx
@@ -268,7 +268,7 @@
           <a:p>
             <a:fld id="{287C9ABC-0C1C-4801-85B9-12829D42DDA4}" type="datetimeFigureOut">
               <a:rPr lang="en-AU" smtClean="0"/>
-              <a:t>1/7/2023</a:t>
+              <a:t>24/3/2025</a:t>
             </a:fld>
             <a:endParaRPr lang="en-AU"/>
           </a:p>
@@ -468,7 +468,7 @@
           <a:p>
             <a:fld id="{287C9ABC-0C1C-4801-85B9-12829D42DDA4}" type="datetimeFigureOut">
               <a:rPr lang="en-AU" smtClean="0"/>
-              <a:t>1/7/2023</a:t>
+              <a:t>24/3/2025</a:t>
             </a:fld>
             <a:endParaRPr lang="en-AU"/>
           </a:p>
@@ -678,7 +678,7 @@
           <a:p>
             <a:fld id="{287C9ABC-0C1C-4801-85B9-12829D42DDA4}" type="datetimeFigureOut">
               <a:rPr lang="en-AU" smtClean="0"/>
-              <a:t>1/7/2023</a:t>
+              <a:t>24/3/2025</a:t>
             </a:fld>
             <a:endParaRPr lang="en-AU"/>
           </a:p>
@@ -878,7 +878,7 @@
           <a:p>
             <a:fld id="{287C9ABC-0C1C-4801-85B9-12829D42DDA4}" type="datetimeFigureOut">
               <a:rPr lang="en-AU" smtClean="0"/>
-              <a:t>1/7/2023</a:t>
+              <a:t>24/3/2025</a:t>
             </a:fld>
             <a:endParaRPr lang="en-AU"/>
           </a:p>
@@ -1154,7 +1154,7 @@
           <a:p>
             <a:fld id="{287C9ABC-0C1C-4801-85B9-12829D42DDA4}" type="datetimeFigureOut">
               <a:rPr lang="en-AU" smtClean="0"/>
-              <a:t>1/7/2023</a:t>
+              <a:t>24/3/2025</a:t>
             </a:fld>
             <a:endParaRPr lang="en-AU"/>
           </a:p>
@@ -1422,7 +1422,7 @@
           <a:p>
             <a:fld id="{287C9ABC-0C1C-4801-85B9-12829D42DDA4}" type="datetimeFigureOut">
               <a:rPr lang="en-AU" smtClean="0"/>
-              <a:t>1/7/2023</a:t>
+              <a:t>24/3/2025</a:t>
             </a:fld>
             <a:endParaRPr lang="en-AU"/>
           </a:p>
@@ -1837,7 +1837,7 @@
           <a:p>
             <a:fld id="{287C9ABC-0C1C-4801-85B9-12829D42DDA4}" type="datetimeFigureOut">
               <a:rPr lang="en-AU" smtClean="0"/>
-              <a:t>1/7/2023</a:t>
+              <a:t>24/3/2025</a:t>
             </a:fld>
             <a:endParaRPr lang="en-AU"/>
           </a:p>
@@ -1979,7 +1979,7 @@
           <a:p>
             <a:fld id="{287C9ABC-0C1C-4801-85B9-12829D42DDA4}" type="datetimeFigureOut">
               <a:rPr lang="en-AU" smtClean="0"/>
-              <a:t>1/7/2023</a:t>
+              <a:t>24/3/2025</a:t>
             </a:fld>
             <a:endParaRPr lang="en-AU"/>
           </a:p>
@@ -2092,7 +2092,7 @@
           <a:p>
             <a:fld id="{287C9ABC-0C1C-4801-85B9-12829D42DDA4}" type="datetimeFigureOut">
               <a:rPr lang="en-AU" smtClean="0"/>
-              <a:t>1/7/2023</a:t>
+              <a:t>24/3/2025</a:t>
             </a:fld>
             <a:endParaRPr lang="en-AU"/>
           </a:p>
@@ -2405,7 +2405,7 @@
           <a:p>
             <a:fld id="{287C9ABC-0C1C-4801-85B9-12829D42DDA4}" type="datetimeFigureOut">
               <a:rPr lang="en-AU" smtClean="0"/>
-              <a:t>1/7/2023</a:t>
+              <a:t>24/3/2025</a:t>
             </a:fld>
             <a:endParaRPr lang="en-AU"/>
           </a:p>
@@ -2694,7 +2694,7 @@
           <a:p>
             <a:fld id="{287C9ABC-0C1C-4801-85B9-12829D42DDA4}" type="datetimeFigureOut">
               <a:rPr lang="en-AU" smtClean="0"/>
-              <a:t>1/7/2023</a:t>
+              <a:t>24/3/2025</a:t>
             </a:fld>
             <a:endParaRPr lang="en-AU"/>
           </a:p>
@@ -2937,7 +2937,7 @@
           <a:p>
             <a:fld id="{287C9ABC-0C1C-4801-85B9-12829D42DDA4}" type="datetimeFigureOut">
               <a:rPr lang="en-AU" smtClean="0"/>
-              <a:t>1/7/2023</a:t>
+              <a:t>24/3/2025</a:t>
             </a:fld>
             <a:endParaRPr lang="en-AU"/>
           </a:p>
@@ -3688,7 +3688,7 @@
         </p:spPr>
         <p:txBody>
           <a:bodyPr>
-            <a:normAutofit/>
+            <a:normAutofit fontScale="90000"/>
           </a:bodyPr>
           <a:lstStyle/>
           <a:p>
@@ -3696,7 +3696,7 @@
               <a:rPr lang="en-AU" sz="7200" dirty="0">
                 <a:latin typeface="Montserrat SemiBold" panose="00000700000000000000" pitchFamily="50" charset="0"/>
               </a:rPr>
-              <a:t>Your Seminar Title</a:t>
+              <a:t>Stable Isotope Mixing Models in R</a:t>
             </a:r>
           </a:p>
         </p:txBody>
@@ -3733,7 +3733,19 @@
               <a:rPr lang="en-AU" sz="3600" dirty="0">
                 <a:latin typeface="Montserrat SemiBold" panose="00000700000000000000" pitchFamily="50" charset="0"/>
               </a:rPr>
-              <a:t>Session #: Session Name</a:t>
+              <a:t>Session 19: Introduction to </a:t>
+            </a:r>
+            <a:r>
+              <a:rPr lang="en-AU" sz="3600" dirty="0" err="1">
+                <a:latin typeface="Montserrat SemiBold" panose="00000700000000000000" pitchFamily="50" charset="0"/>
+              </a:rPr>
+              <a:t>cosimmr</a:t>
+            </a:r>
+            <a:r>
+              <a:rPr lang="en-AU" sz="3600" dirty="0">
+                <a:latin typeface="Montserrat SemiBold" panose="00000700000000000000" pitchFamily="50" charset="0"/>
+              </a:rPr>
+              <a:t> and open practical session</a:t>
             </a:r>
           </a:p>
         </p:txBody>
@@ -3861,19 +3873,26 @@
           <a:p>
             <a:r>
               <a:rPr lang="en-AU" dirty="0"/>
-              <a:t>1) …</a:t>
-            </a:r>
-          </a:p>
-          <a:p>
+              <a:t>Introduction to the latest SIMM called </a:t>
+            </a:r>
+            <a:r>
+              <a:rPr lang="en-AU" dirty="0" err="1"/>
+              <a:t>cosimmr</a:t>
+            </a:r>
             <a:r>
               <a:rPr lang="en-AU" dirty="0"/>
-              <a:t>2) …</a:t>
-            </a:r>
+              <a:t> which is potentially much faster to fit than </a:t>
+            </a:r>
+            <a:r>
+              <a:rPr lang="en-AU" dirty="0" err="1"/>
+              <a:t>MixSIAR</a:t>
+            </a:r>
+            <a:endParaRPr lang="en-AU" dirty="0"/>
           </a:p>
           <a:p>
             <a:r>
               <a:rPr lang="en-AU" dirty="0"/>
-              <a:t>…</a:t>
+              <a:t>An open practical session for discussion and/or analysing your own data</a:t>
             </a:r>
           </a:p>
         </p:txBody>
